--- a/data-eng/decks/w4d1s4.pptx
+++ b/data-eng/decks/w4d1s4.pptx
@@ -3098,7 +3098,7 @@
       <p:grpSpPr/>
       <p:sp>
         <p:nvSpPr>
-          <p:cNvPr id="2" name="Oval 1"/>
+          <p:cNvPr id="2" name="deckgen:decor"/>
           <p:cNvSpPr/>
           <p:nvPr/>
         </p:nvSpPr>
@@ -3128,7 +3128,7 @@
       </p:sp>
       <p:sp>
         <p:nvSpPr>
-          <p:cNvPr id="3" name="Oval 2"/>
+          <p:cNvPr id="3" name="deckgen:decor"/>
           <p:cNvSpPr/>
           <p:nvPr/>
         </p:nvSpPr>
@@ -3158,7 +3158,7 @@
       </p:sp>
       <p:sp>
         <p:nvSpPr>
-          <p:cNvPr id="4" name="Oval 3"/>
+          <p:cNvPr id="4" name="deckgen:decor"/>
           <p:cNvSpPr/>
           <p:nvPr/>
         </p:nvSpPr>
@@ -3188,7 +3188,7 @@
       </p:sp>
       <p:sp>
         <p:nvSpPr>
-          <p:cNvPr id="5" name="Rectangle 4"/>
+          <p:cNvPr id="5" name="deckgen:decor"/>
           <p:cNvSpPr/>
           <p:nvPr/>
         </p:nvSpPr>
@@ -3218,7 +3218,7 @@
       </p:sp>
       <p:sp>
         <p:nvSpPr>
-          <p:cNvPr id="6" name="Oval 5"/>
+          <p:cNvPr id="6" name="deckgen:decor"/>
           <p:cNvSpPr/>
           <p:nvPr/>
         </p:nvSpPr>
@@ -3248,7 +3248,7 @@
       </p:sp>
       <p:sp>
         <p:nvSpPr>
-          <p:cNvPr id="7" name="Oval 6"/>
+          <p:cNvPr id="7" name="deckgen:decor"/>
           <p:cNvSpPr/>
           <p:nvPr/>
         </p:nvSpPr>
@@ -3278,7 +3278,7 @@
       </p:sp>
       <p:sp>
         <p:nvSpPr>
-          <p:cNvPr id="8" name="Oval 7"/>
+          <p:cNvPr id="8" name="deckgen:decor"/>
           <p:cNvSpPr/>
           <p:nvPr/>
         </p:nvSpPr>
@@ -3308,7 +3308,7 @@
       </p:sp>
       <p:sp>
         <p:nvSpPr>
-          <p:cNvPr id="9" name="Oval 8"/>
+          <p:cNvPr id="9" name="deckgen:decor"/>
           <p:cNvSpPr/>
           <p:nvPr/>
         </p:nvSpPr>
@@ -3338,7 +3338,7 @@
       </p:sp>
       <p:sp>
         <p:nvSpPr>
-          <p:cNvPr id="10" name="Rectangle 9"/>
+          <p:cNvPr id="10" name="deckgen:decor"/>
           <p:cNvSpPr/>
           <p:nvPr/>
         </p:nvSpPr>
@@ -3598,7 +3598,7 @@
       <p:grpSpPr/>
       <p:sp>
         <p:nvSpPr>
-          <p:cNvPr id="2" name="Oval 1"/>
+          <p:cNvPr id="2" name="deckgen:decor"/>
           <p:cNvSpPr/>
           <p:nvPr/>
         </p:nvSpPr>
@@ -3628,7 +3628,7 @@
       </p:sp>
       <p:sp>
         <p:nvSpPr>
-          <p:cNvPr id="3" name="Oval 2"/>
+          <p:cNvPr id="3" name="deckgen:decor"/>
           <p:cNvSpPr/>
           <p:nvPr/>
         </p:nvSpPr>
@@ -3658,7 +3658,7 @@
       </p:sp>
       <p:sp>
         <p:nvSpPr>
-          <p:cNvPr id="4" name="Oval 3"/>
+          <p:cNvPr id="4" name="deckgen:decor"/>
           <p:cNvSpPr/>
           <p:nvPr/>
         </p:nvSpPr>
@@ -4589,7 +4589,7 @@
       <p:grpSpPr/>
       <p:sp>
         <p:nvSpPr>
-          <p:cNvPr id="2" name="Oval 1"/>
+          <p:cNvPr id="2" name="deckgen:decor"/>
           <p:cNvSpPr/>
           <p:nvPr/>
         </p:nvSpPr>
@@ -4619,7 +4619,7 @@
       </p:sp>
       <p:sp>
         <p:nvSpPr>
-          <p:cNvPr id="3" name="Oval 2"/>
+          <p:cNvPr id="3" name="deckgen:decor"/>
           <p:cNvSpPr/>
           <p:nvPr/>
         </p:nvSpPr>
@@ -4649,7 +4649,7 @@
       </p:sp>
       <p:sp>
         <p:nvSpPr>
-          <p:cNvPr id="4" name="Oval 3"/>
+          <p:cNvPr id="4" name="deckgen:decor"/>
           <p:cNvSpPr/>
           <p:nvPr/>
         </p:nvSpPr>
@@ -6167,7 +6167,7 @@
                 <a:ea typeface="Pretendard"/>
                 <a:cs typeface="Pretendard"/>
               </a:rPr>
-              <a:t>모든 명령 앞에 docker compose exec mc — 서버 이름 local 은 alias set 에서 정한 것</a:t>
+              <a:t>모든 명령 앞에 docker compose exec mc — 별칭 local 은 compose 의 MC_HOST_local 이 정한 것</a:t>
             </a:r>
           </a:p>
         </p:txBody>
@@ -6304,7 +6304,7 @@
       <p:grpSpPr/>
       <p:sp>
         <p:nvSpPr>
-          <p:cNvPr id="2" name="Oval 1"/>
+          <p:cNvPr id="2" name="deckgen:decor"/>
           <p:cNvSpPr/>
           <p:nvPr/>
         </p:nvSpPr>
@@ -6334,7 +6334,7 @@
       </p:sp>
       <p:sp>
         <p:nvSpPr>
-          <p:cNvPr id="3" name="Oval 2"/>
+          <p:cNvPr id="3" name="deckgen:decor"/>
           <p:cNvSpPr/>
           <p:nvPr/>
         </p:nvSpPr>
@@ -6364,7 +6364,7 @@
       </p:sp>
       <p:sp>
         <p:nvSpPr>
-          <p:cNvPr id="4" name="Oval 3"/>
+          <p:cNvPr id="4" name="deckgen:decor"/>
           <p:cNvSpPr/>
           <p:nvPr/>
         </p:nvSpPr>
@@ -6469,7 +6469,7 @@
                 <a:ea typeface="Pretendard"/>
                 <a:cs typeface="Pretendard"/>
               </a:rPr>
-              <a:t>4-2 를 위한 상태 확인 — 네 가지가 있으면 끝</a:t>
+              <a:t>4-2 준비 상태 — down → up 뒤에도 그대로</a:t>
             </a:r>
           </a:p>
         </p:txBody>
@@ -6513,7 +6513,7 @@
         <p:spPr>
           <a:xfrm>
             <a:off x="1143000" y="2781300"/>
-            <a:ext cx="988266" cy="571500"/>
+            <a:ext cx="1133142" cy="571500"/>
           </a:xfrm>
           <a:prstGeom prst="rect">
             <a:avLst/>
@@ -6543,7 +6543,7 @@
         <p:spPr>
           <a:xfrm>
             <a:off x="1143000" y="2781300"/>
-            <a:ext cx="988266" cy="571500"/>
+            <a:ext cx="1133142" cy="571500"/>
           </a:xfrm>
           <a:prstGeom prst="rect">
             <a:avLst/>
@@ -6583,8 +6583,8 @@
         </p:nvSpPr>
         <p:spPr>
           <a:xfrm>
-            <a:off x="2131266" y="2781300"/>
-            <a:ext cx="15013734" cy="571500"/>
+            <a:off x="2276142" y="2781300"/>
+            <a:ext cx="14868858" cy="571500"/>
           </a:xfrm>
           <a:prstGeom prst="rect">
             <a:avLst/>
@@ -6615,8 +6615,8 @@
         </p:nvSpPr>
         <p:spPr>
           <a:xfrm>
-            <a:off x="2283666" y="2781300"/>
-            <a:ext cx="14708934" cy="571500"/>
+            <a:off x="2428542" y="2781300"/>
+            <a:ext cx="14564058" cy="571500"/>
           </a:xfrm>
           <a:prstGeom prst="rect">
             <a:avLst/>
@@ -6657,7 +6657,7 @@
         <p:spPr>
           <a:xfrm>
             <a:off x="1143000" y="3429000"/>
-            <a:ext cx="988266" cy="571500"/>
+            <a:ext cx="1133142" cy="571500"/>
           </a:xfrm>
           <a:prstGeom prst="rect">
             <a:avLst/>
@@ -6687,7 +6687,7 @@
         <p:spPr>
           <a:xfrm>
             <a:off x="1143000" y="3429000"/>
-            <a:ext cx="988266" cy="571500"/>
+            <a:ext cx="1133142" cy="571500"/>
           </a:xfrm>
           <a:prstGeom prst="rect">
             <a:avLst/>
@@ -6727,8 +6727,8 @@
         </p:nvSpPr>
         <p:spPr>
           <a:xfrm>
-            <a:off x="2131266" y="3429000"/>
-            <a:ext cx="15013734" cy="571500"/>
+            <a:off x="2276142" y="3429000"/>
+            <a:ext cx="14868858" cy="571500"/>
           </a:xfrm>
           <a:prstGeom prst="rect">
             <a:avLst/>
@@ -6759,8 +6759,8 @@
         </p:nvSpPr>
         <p:spPr>
           <a:xfrm>
-            <a:off x="2283666" y="3429000"/>
-            <a:ext cx="14708934" cy="571500"/>
+            <a:off x="2428542" y="3429000"/>
+            <a:ext cx="14564058" cy="571500"/>
           </a:xfrm>
           <a:prstGeom prst="rect">
             <a:avLst/>
@@ -6801,7 +6801,7 @@
         <p:spPr>
           <a:xfrm>
             <a:off x="1143000" y="4076700"/>
-            <a:ext cx="988266" cy="571500"/>
+            <a:ext cx="1133142" cy="571500"/>
           </a:xfrm>
           <a:prstGeom prst="rect">
             <a:avLst/>
@@ -6831,7 +6831,7 @@
         <p:spPr>
           <a:xfrm>
             <a:off x="1143000" y="4076700"/>
-            <a:ext cx="988266" cy="571500"/>
+            <a:ext cx="1133142" cy="571500"/>
           </a:xfrm>
           <a:prstGeom prst="rect">
             <a:avLst/>
@@ -6858,7 +6858,7 @@
                 <a:ea typeface="Pretendard"/>
                 <a:cs typeface="Pretendard"/>
               </a:rPr>
-              <a:t>첫 파일</a:t>
+              <a:t>오브젝트</a:t>
             </a:r>
           </a:p>
         </p:txBody>
@@ -6871,8 +6871,8 @@
         </p:nvSpPr>
         <p:spPr>
           <a:xfrm>
-            <a:off x="2131266" y="4076700"/>
-            <a:ext cx="15013734" cy="571500"/>
+            <a:off x="2276142" y="4076700"/>
+            <a:ext cx="14868858" cy="571500"/>
           </a:xfrm>
           <a:prstGeom prst="rect">
             <a:avLst/>
@@ -6903,8 +6903,8 @@
         </p:nvSpPr>
         <p:spPr>
           <a:xfrm>
-            <a:off x="2283666" y="4076700"/>
-            <a:ext cx="14708934" cy="571500"/>
+            <a:off x="2428542" y="4076700"/>
+            <a:ext cx="14564058" cy="571500"/>
           </a:xfrm>
           <a:prstGeom prst="rect">
             <a:avLst/>
@@ -6931,7 +6931,7 @@
                 <a:ea typeface="Pretendard"/>
                 <a:cs typeface="Pretendard"/>
               </a:rPr>
-              <a:t>mc ls --recursive local/raw → orders/orders_2026-08-01.csv</a:t>
+              <a:t>mc ls --recursive local/raw → 다섯 개</a:t>
             </a:r>
           </a:p>
         </p:txBody>
@@ -6945,7 +6945,7 @@
         <p:spPr>
           <a:xfrm>
             <a:off x="1143000" y="4724400"/>
-            <a:ext cx="988266" cy="571500"/>
+            <a:ext cx="1133142" cy="571500"/>
           </a:xfrm>
           <a:prstGeom prst="rect">
             <a:avLst/>
@@ -6975,7 +6975,7 @@
         <p:spPr>
           <a:xfrm>
             <a:off x="1143000" y="4724400"/>
-            <a:ext cx="988266" cy="571500"/>
+            <a:ext cx="1133142" cy="571500"/>
           </a:xfrm>
           <a:prstGeom prst="rect">
             <a:avLst/>
@@ -7002,7 +7002,7 @@
                 <a:ea typeface="Pretendard"/>
                 <a:cs typeface="Pretendard"/>
               </a:rPr>
-              <a:t>폴더</a:t>
+              <a:t>볼륨</a:t>
             </a:r>
           </a:p>
         </p:txBody>
@@ -7015,8 +7015,8 @@
         </p:nvSpPr>
         <p:spPr>
           <a:xfrm>
-            <a:off x="2131266" y="4724400"/>
-            <a:ext cx="15013734" cy="571500"/>
+            <a:off x="2276142" y="4724400"/>
+            <a:ext cx="14868858" cy="571500"/>
           </a:xfrm>
           <a:prstGeom prst="rect">
             <a:avLst/>
@@ -7047,8 +7047,8 @@
         </p:nvSpPr>
         <p:spPr>
           <a:xfrm>
-            <a:off x="2283666" y="4724400"/>
-            <a:ext cx="14708934" cy="571500"/>
+            <a:off x="2428542" y="4724400"/>
+            <a:ext cx="14564058" cy="571500"/>
           </a:xfrm>
           <a:prstGeom prst="rect">
             <a:avLst/>
@@ -7075,7 +7075,7 @@
                 <a:ea typeface="Pretendard"/>
                 <a:cs typeface="Pretendard"/>
               </a:rPr>
-              <a:t>ls → docker-compose.yml</a:t>
+              <a:t>docker compose down → up -d 뒤에도 같은 다섯 개</a:t>
             </a:r>
           </a:p>
         </p:txBody>
@@ -7089,7 +7089,7 @@
         <p:spPr>
           <a:xfrm>
             <a:off x="1143000" y="5372100"/>
-            <a:ext cx="988266" cy="571500"/>
+            <a:ext cx="1133142" cy="571500"/>
           </a:xfrm>
           <a:prstGeom prst="rect">
             <a:avLst/>
@@ -7119,7 +7119,7 @@
         <p:spPr>
           <a:xfrm>
             <a:off x="1143000" y="5372100"/>
-            <a:ext cx="988266" cy="571500"/>
+            <a:ext cx="1133142" cy="571500"/>
           </a:xfrm>
           <a:prstGeom prst="rect">
             <a:avLst/>
@@ -7159,8 +7159,8 @@
         </p:nvSpPr>
         <p:spPr>
           <a:xfrm>
-            <a:off x="2131266" y="5372100"/>
-            <a:ext cx="15013734" cy="571500"/>
+            <a:off x="2276142" y="5372100"/>
+            <a:ext cx="14868858" cy="571500"/>
           </a:xfrm>
           <a:prstGeom prst="rect">
             <a:avLst/>
@@ -7191,8 +7191,8 @@
         </p:nvSpPr>
         <p:spPr>
           <a:xfrm>
-            <a:off x="2283666" y="5372100"/>
-            <a:ext cx="14708934" cy="571500"/>
+            <a:off x="2428542" y="5372100"/>
+            <a:ext cx="14564058" cy="571500"/>
           </a:xfrm>
           <a:prstGeom prst="rect">
             <a:avLst/>
@@ -7260,7 +7260,7 @@
                 <a:ea typeface="Pretendard"/>
                 <a:cs typeface="Pretendard"/>
               </a:rPr>
-              <a:t>cd ~/lakehouse 에서 실행 — 4-2 는 이 compose 파일을 확장해 spark·REST 카탈로그를 붙인다</a:t>
+              <a:t>다섯 = hello.txt · demo/ 둘 · from-python.txt · orders/orders_2026-08-01.csv — cd ~/lakehouse 에서</a:t>
             </a:r>
           </a:p>
         </p:txBody>
@@ -7397,7 +7397,7 @@
       <p:grpSpPr/>
       <p:sp>
         <p:nvSpPr>
-          <p:cNvPr id="2" name="Oval 1"/>
+          <p:cNvPr id="2" name="deckgen:decor"/>
           <p:cNvSpPr/>
           <p:nvPr/>
         </p:nvSpPr>
@@ -7427,7 +7427,7 @@
       </p:sp>
       <p:sp>
         <p:nvSpPr>
-          <p:cNvPr id="3" name="Oval 2"/>
+          <p:cNvPr id="3" name="deckgen:decor"/>
           <p:cNvSpPr/>
           <p:nvPr/>
         </p:nvSpPr>
@@ -7457,7 +7457,7 @@
       </p:sp>
       <p:sp>
         <p:nvSpPr>
-          <p:cNvPr id="4" name="Oval 3"/>
+          <p:cNvPr id="4" name="deckgen:decor"/>
           <p:cNvSpPr/>
           <p:nvPr/>
         </p:nvSpPr>
@@ -7884,7 +7884,7 @@
                 <a:ea typeface="Pretendard"/>
                 <a:cs typeface="Pretendard"/>
               </a:rPr>
-              <a:t>키의 슬래시가 이름의 일부라는 것을 실습으로 확인했다</a:t>
+              <a:t>키의 슬래시가 이름의 일부임을 raw/demo/dt=… 로 확인했다</a:t>
             </a:r>
           </a:p>
         </p:txBody>
@@ -8322,7 +8322,7 @@
                 <a:ea typeface="Pretendard"/>
                 <a:cs typeface="Pretendard"/>
               </a:rPr>
-              <a:t>alias set → mb → ls 로 raw·warehouse 버킷을 만들었다</a:t>
+              <a:t>alias(local) 확인 → mb → ls 로 raw·warehouse 버킷을 만들었다</a:t>
             </a:r>
           </a:p>
         </p:txBody>
@@ -8468,7 +8468,7 @@
                 <a:ea typeface="Pretendard"/>
                 <a:cs typeface="Pretendard"/>
               </a:rPr>
-              <a:t>mc cp 로 올린 파일을 mc cat 과 웹 콘솔 양쪽에서 확인했다</a:t>
+              <a:t>down → up 뒤에도 버킷·파일이 남는 것(볼륨)을 확인했다</a:t>
             </a:r>
           </a:p>
         </p:txBody>
@@ -8760,7 +8760,7 @@
                 <a:ea typeface="Pretendard"/>
                 <a:cs typeface="Pretendard"/>
               </a:rPr>
-              <a:t>랜딩 존 raw/orders/ 에 첫 배치 파일을 올려 뒀다</a:t>
+              <a:t>랜딩 존 raw/orders/ 엔 첫 배치만 — 연습 키는 raw/demo/</a:t>
             </a:r>
           </a:p>
         </p:txBody>
@@ -8897,7 +8897,7 @@
       <p:grpSpPr/>
       <p:sp>
         <p:nvSpPr>
-          <p:cNvPr id="2" name="Oval 1"/>
+          <p:cNvPr id="2" name="deckgen:decor"/>
           <p:cNvSpPr/>
           <p:nvPr/>
         </p:nvSpPr>
@@ -8927,7 +8927,7 @@
       </p:sp>
       <p:sp>
         <p:nvSpPr>
-          <p:cNvPr id="3" name="Oval 2"/>
+          <p:cNvPr id="3" name="deckgen:decor"/>
           <p:cNvSpPr/>
           <p:nvPr/>
         </p:nvSpPr>
@@ -8957,7 +8957,7 @@
       </p:sp>
       <p:sp>
         <p:nvSpPr>
-          <p:cNvPr id="4" name="Oval 3"/>
+          <p:cNvPr id="4" name="deckgen:decor"/>
           <p:cNvSpPr/>
           <p:nvPr/>
         </p:nvSpPr>
@@ -10599,7 +10599,7 @@
       <p:grpSpPr/>
       <p:sp>
         <p:nvSpPr>
-          <p:cNvPr id="2" name="Oval 1"/>
+          <p:cNvPr id="2" name="deckgen:decor"/>
           <p:cNvSpPr/>
           <p:nvPr/>
         </p:nvSpPr>
@@ -10629,7 +10629,7 @@
       </p:sp>
       <p:sp>
         <p:nvSpPr>
-          <p:cNvPr id="3" name="Oval 2"/>
+          <p:cNvPr id="3" name="deckgen:decor"/>
           <p:cNvSpPr/>
           <p:nvPr/>
         </p:nvSpPr>
@@ -10659,7 +10659,7 @@
       </p:sp>
       <p:sp>
         <p:nvSpPr>
-          <p:cNvPr id="4" name="Oval 3"/>
+          <p:cNvPr id="4" name="deckgen:decor"/>
           <p:cNvSpPr/>
           <p:nvPr/>
         </p:nvSpPr>
@@ -11719,7 +11719,7 @@
       <p:grpSpPr/>
       <p:sp>
         <p:nvSpPr>
-          <p:cNvPr id="2" name="Oval 1"/>
+          <p:cNvPr id="2" name="deckgen:decor"/>
           <p:cNvSpPr/>
           <p:nvPr/>
         </p:nvSpPr>
@@ -11749,7 +11749,7 @@
       </p:sp>
       <p:sp>
         <p:nvSpPr>
-          <p:cNvPr id="3" name="Oval 2"/>
+          <p:cNvPr id="3" name="deckgen:decor"/>
           <p:cNvSpPr/>
           <p:nvPr/>
         </p:nvSpPr>
@@ -11779,7 +11779,7 @@
       </p:sp>
       <p:sp>
         <p:nvSpPr>
-          <p:cNvPr id="4" name="Oval 3"/>
+          <p:cNvPr id="4" name="deckgen:decor"/>
           <p:cNvSpPr/>
           <p:nvPr/>
         </p:nvSpPr>
@@ -11985,7 +11985,7 @@
       </p:sp>
       <p:sp>
         <p:nvSpPr>
-          <p:cNvPr id="10" name="TextBox 9"/>
+          <p:cNvPr id="10" name="deckgen:ornament"/>
           <p:cNvSpPr txBox="1"/>
           <p:nvPr/>
         </p:nvSpPr>
@@ -12170,7 +12170,7 @@
       </p:sp>
       <p:sp>
         <p:nvSpPr>
-          <p:cNvPr id="14" name="TextBox 13"/>
+          <p:cNvPr id="14" name="deckgen:ornament"/>
           <p:cNvSpPr txBox="1"/>
           <p:nvPr/>
         </p:nvSpPr>
@@ -12355,7 +12355,7 @@
       </p:sp>
       <p:sp>
         <p:nvSpPr>
-          <p:cNvPr id="18" name="TextBox 17"/>
+          <p:cNvPr id="18" name="deckgen:ornament"/>
           <p:cNvSpPr txBox="1"/>
           <p:nvPr/>
         </p:nvSpPr>
@@ -12540,7 +12540,7 @@
       </p:sp>
       <p:sp>
         <p:nvSpPr>
-          <p:cNvPr id="22" name="TextBox 21"/>
+          <p:cNvPr id="22" name="deckgen:ornament"/>
           <p:cNvSpPr txBox="1"/>
           <p:nvPr/>
         </p:nvSpPr>
@@ -12844,7 +12844,7 @@
       <p:grpSpPr/>
       <p:sp>
         <p:nvSpPr>
-          <p:cNvPr id="2" name="Oval 1"/>
+          <p:cNvPr id="2" name="deckgen:decor"/>
           <p:cNvSpPr/>
           <p:nvPr/>
         </p:nvSpPr>
@@ -12874,7 +12874,7 @@
       </p:sp>
       <p:sp>
         <p:nvSpPr>
-          <p:cNvPr id="3" name="Oval 2"/>
+          <p:cNvPr id="3" name="deckgen:decor"/>
           <p:cNvSpPr/>
           <p:nvPr/>
         </p:nvSpPr>
@@ -13282,7 +13282,7 @@
                 <a:ea typeface="Pretendard"/>
                 <a:cs typeface="Pretendard"/>
               </a:rPr>
-              <a:t>Spark + REST 카탈로그 + MinIO Compose</a:t>
+              <a:t>REST 카탈로그 + Spark + MinIO Compose</a:t>
             </a:r>
           </a:p>
         </p:txBody>

--- a/data-eng/decks/w4d1s4.pptx
+++ b/data-eng/decks/w4d1s4.pptx
@@ -12707,7 +12707,7 @@
                 <a:ea typeface="Pretendard"/>
                 <a:cs typeface="Pretendard"/>
               </a:rPr>
-              <a:t>준비: minio 가 떠 있는 ~/lakehouse 그대로 · 이미지 수백 MB 내려받기(네트워크) · Docker 메모리 8GB 이상</a:t>
+              <a:t>주말 과제: 이미지 둘 미리 받기 — spark-iceberg 6.46GB · iceberg-rest 746MB(실측 24분) · ~/lakehouse 그대로</a:t>
             </a:r>
           </a:p>
         </p:txBody>
@@ -13626,7 +13626,7 @@
                 <a:ea typeface="Pretendard"/>
                 <a:cs typeface="Pretendard"/>
               </a:rPr>
-              <a:t>minio Up 상태 · Docker 메모리 8GB+</a:t>
+              <a:t>주말에 이미지 둘(7GB) 받아 두기</a:t>
             </a:r>
           </a:p>
         </p:txBody>
